--- a/docs/Claims_Assistant_Panel_Deck.pptx
+++ b/docs/Claims_Assistant_Panel_Deck.pptx
@@ -115,31 +115,31 @@
   <p:extLst>
     <p:ext uri="{521415D9-36F7-43E2-AB2F-B90AF26B5E84}">
       <p14:sectionLst xmlns:p14="http://schemas.microsoft.com/office/powerpoint/2010/main">
-        <p14:section name="Opening" id="{ab2afe26-480d-2cc3-5e28-544f38d096f2}">
+        <p14:section name="Opening" id="{985227ef-2e0e-9321-e823-31ea26dc912a}">
           <p14:sldIdLst>
             <p14:sldId id="256"/>
           </p14:sldIdLst>
         </p14:section>
-        <p14:section name="Problem and design" id="{719698ac-c280-fe7c-dfa8-c3189ba10879}">
+        <p14:section name="Problem and design" id="{5afabd52-5fe4-9876-6013-192ac3e3fb20}">
           <p14:sldIdLst>
             <p14:sldId id="257"/>
             <p14:sldId id="258"/>
             <p14:sldId id="259"/>
           </p14:sldIdLst>
         </p14:section>
-        <p14:section name="Synapt" id="{4ffdd4be-a39f-c0bb-ecc2-43ce6a7db4bf}">
+        <p14:section name="Synapt" id="{6fc92f44-707d-25f5-4859-616f958e7e44}">
           <p14:sldIdLst>
             <p14:sldId id="260"/>
           </p14:sldIdLst>
         </p14:section>
-        <p14:section name="Demo and evidence" id="{ccbc8ba8-fe5b-2ada-4341-84fc7ee309f7}">
+        <p14:section name="Demo and evidence" id="{cb6ec3a7-3b03-d0dc-4a50-82bd4603afc7}">
           <p14:sldIdLst>
             <p14:sldId id="261"/>
             <p14:sldId id="262"/>
             <p14:sldId id="263"/>
           </p14:sldIdLst>
         </p14:section>
-        <p14:section name="Close" id="{18c5db76-1f2b-ef8f-afdf-5fdcc1b3296c}">
+        <p14:section name="Close" id="{6bfa9303-0eb3-150a-646f-74c4cdf3febe}">
           <p14:sldIdLst>
             <p14:sldId id="264"/>
           </p14:sldIdLst>
@@ -151,391 +151,6 @@
     </p:ext>
   </p:extLst>
 </p:presentation>
-</file>
-
-<file path=ppt/charts/chart1.xml><?xml version="1.0" encoding="utf-8"?>
-<c:chartSpace xmlns:c="http://schemas.openxmlformats.org/drawingml/2006/chart" xmlns:a="http://schemas.openxmlformats.org/drawingml/2006/main" xmlns:r="http://schemas.openxmlformats.org/officeDocument/2006/relationships">
-  <c:date1904 val="0"/>
-  <c:roundedCorners val="1"/>
-  <c:chart>
-    <c:title>
-      <c:tx>
-        <c:rich>
-          <a:bodyPr/>
-          <a:lstStyle/>
-          <a:p>
-            <a:pPr>
-              <a:defRPr sz="1400" b="0" i="0" u="none" strike="noStrike">
-                <a:solidFill>
-                  <a:srgbClr val="0B2530"/>
-                </a:solidFill>
-                <a:latin typeface="+mn-lt"/>
-              </a:defRPr>
-            </a:pPr>
-            <a:r>
-              <a:rPr sz="1400" b="0" i="0" u="none" strike="noStrike">
-                <a:solidFill>
-                  <a:srgbClr val="0B2530"/>
-                </a:solidFill>
-                <a:latin typeface="+mn-lt"/>
-              </a:rPr>
-              <a:t>Share of returned cards that match the query claim (%)</a:t>
-            </a:r>
-          </a:p>
-        </c:rich>
-      </c:tx>
-      <c:layout/>
-      <c:overlay val="0"/>
-    </c:title>
-    <c:autoTitleDeleted val="0"/>
-    <c:plotArea>
-      <c:layout/>
-      <c:barChart>
-        <c:barDir val="col"/>
-        <c:grouping val="clustered"/>
-        <c:varyColors val="0"/>
-        <c:ser>
-          <c:idx val="0"/>
-          <c:order val="0"/>
-          <c:tx>
-            <c:strRef>
-              <c:f>Sheet1!$B$1</c:f>
-              <c:strCache>
-                <c:ptCount val="1"/>
-                <c:pt idx="0">
-                  <c:v>Synapt's returned cards</c:v>
-                </c:pt>
-              </c:strCache>
-            </c:strRef>
-          </c:tx>
-          <c:spPr>
-            <a:solidFill>
-              <a:srgbClr val="0E7C86"/>
-            </a:solidFill>
-            <a:effectLst/>
-          </c:spPr>
-          <c:invertIfNegative val="0"/>
-          <c:dLbls>
-            <c:numFmt formatCode="#,##0" sourceLinked="0"/>
-            <c:txPr>
-              <a:bodyPr/>
-              <a:lstStyle/>
-              <a:p>
-                <a:pPr>
-                  <a:defRPr b="0" i="0" strike="noStrike" sz="1200" u="none">
-                    <a:solidFill>
-                      <a:srgbClr val="0B2530"/>
-                    </a:solidFill>
-                    <a:latin typeface="+mn-lt"/>
-                  </a:defRPr>
-                </a:pPr>
-              </a:p>
-            </c:txPr>
-            <c:showLegendKey val="0"/>
-            <c:showVal val="1"/>
-            <c:showCatName val="0"/>
-            <c:showSerName val="0"/>
-            <c:showPercent val="0"/>
-            <c:showBubbleSize val="0"/>
-            <c:showLeaderLines val="0"/>
-          </c:dLbls>
-          <c:cat>
-            <c:multiLvlStrRef>
-              <c:f>Sheet1!$A$2:$A$5</c:f>
-              <c:multiLvlStrCache>
-                <c:ptCount val="4"/>
-                <c:lvl>
-                  <c:pt idx="0">
-                    <c:v>Claim type</c:v>
-                  </c:pt>
-                  <c:pt idx="1">
-                    <c:v>Amount band</c:v>
-                  </c:pt>
-                  <c:pt idx="2">
-                    <c:v>State</c:v>
-                  </c:pt>
-                  <c:pt idx="3">
-                    <c:v>Prior claims</c:v>
-                  </c:pt>
-                </c:lvl>
-              </c:multiLvlStrCache>
-            </c:multiLvlStrRef>
-          </c:cat>
-          <c:val>
-            <c:numRef>
-              <c:f>Sheet1!$B$2:$B$5</c:f>
-              <c:numCache>
-                <c:formatCode>General</c:formatCode>
-                <c:ptCount val="4"/>
-                <c:pt idx="0">
-                  <c:v>34</c:v>
-                </c:pt>
-                <c:pt idx="1">
-                  <c:v>23</c:v>
-                </c:pt>
-                <c:pt idx="2">
-                  <c:v>7</c:v>
-                </c:pt>
-                <c:pt idx="3">
-                  <c:v>35</c:v>
-                </c:pt>
-              </c:numCache>
-            </c:numRef>
-          </c:val>
-        </c:ser>
-        <c:ser>
-          <c:idx val="1"/>
-          <c:order val="1"/>
-          <c:tx>
-            <c:strRef>
-              <c:f>Sheet1!$C$1</c:f>
-              <c:strCache>
-                <c:ptCount val="1"/>
-                <c:pt idx="0">
-                  <c:v>Random pair of cards</c:v>
-                </c:pt>
-              </c:strCache>
-            </c:strRef>
-          </c:tx>
-          <c:spPr>
-            <a:solidFill>
-              <a:srgbClr val="AEBBC0"/>
-            </a:solidFill>
-            <a:effectLst/>
-          </c:spPr>
-          <c:invertIfNegative val="0"/>
-          <c:dLbls>
-            <c:numFmt formatCode="#,##0" sourceLinked="0"/>
-            <c:txPr>
-              <a:bodyPr/>
-              <a:lstStyle/>
-              <a:p>
-                <a:pPr>
-                  <a:defRPr b="0" i="0" strike="noStrike" sz="1200" u="none">
-                    <a:solidFill>
-                      <a:srgbClr val="0B2530"/>
-                    </a:solidFill>
-                    <a:latin typeface="+mn-lt"/>
-                  </a:defRPr>
-                </a:pPr>
-              </a:p>
-            </c:txPr>
-            <c:showLegendKey val="0"/>
-            <c:showVal val="1"/>
-            <c:showCatName val="0"/>
-            <c:showSerName val="0"/>
-            <c:showPercent val="0"/>
-            <c:showBubbleSize val="0"/>
-            <c:showLeaderLines val="0"/>
-          </c:dLbls>
-          <c:cat>
-            <c:multiLvlStrRef>
-              <c:f>Sheet1!$A$2:$A$5</c:f>
-              <c:multiLvlStrCache>
-                <c:ptCount val="4"/>
-                <c:lvl>
-                  <c:pt idx="0">
-                    <c:v>Claim type</c:v>
-                  </c:pt>
-                  <c:pt idx="1">
-                    <c:v>Amount band</c:v>
-                  </c:pt>
-                  <c:pt idx="2">
-                    <c:v>State</c:v>
-                  </c:pt>
-                  <c:pt idx="3">
-                    <c:v>Prior claims</c:v>
-                  </c:pt>
-                </c:lvl>
-              </c:multiLvlStrCache>
-            </c:multiLvlStrRef>
-          </c:cat>
-          <c:val>
-            <c:numRef>
-              <c:f>Sheet1!$C$2:$C$5</c:f>
-              <c:numCache>
-                <c:formatCode>General</c:formatCode>
-                <c:ptCount val="4"/>
-                <c:pt idx="0">
-                  <c:v>20</c:v>
-                </c:pt>
-                <c:pt idx="1">
-                  <c:v>16</c:v>
-                </c:pt>
-                <c:pt idx="2">
-                  <c:v>4</c:v>
-                </c:pt>
-                <c:pt idx="3">
-                  <c:v>35</c:v>
-                </c:pt>
-              </c:numCache>
-            </c:numRef>
-          </c:val>
-        </c:ser>
-        <c:dLbls>
-          <c:numFmt formatCode="#,##0" sourceLinked="0"/>
-          <c:txPr>
-            <a:bodyPr/>
-            <a:lstStyle/>
-            <a:p>
-              <a:pPr>
-                <a:defRPr b="0" i="0" strike="noStrike" sz="1200" u="none">
-                  <a:solidFill>
-                    <a:srgbClr val="0B2530"/>
-                  </a:solidFill>
-                  <a:latin typeface="+mn-lt"/>
-                </a:defRPr>
-              </a:pPr>
-            </a:p>
-          </c:txPr>
-          <c:showLegendKey val="0"/>
-          <c:showVal val="1"/>
-          <c:showCatName val="0"/>
-          <c:showSerName val="0"/>
-          <c:showPercent val="0"/>
-          <c:showBubbleSize val="0"/>
-          <c:showLeaderLines val="0"/>
-        </c:dLbls>
-        <c:gapWidth val="60"/>
-        <c:overlap val="0"/>
-        <c:axId val="2094734554"/>
-        <c:axId val="2094734552"/>
-        <c:axId val="2094734556"/>
-      </c:barChart>
-      <c:catAx>
-        <c:axId val="2094734554"/>
-        <c:scaling>
-          <c:orientation val="minMax"/>
-        </c:scaling>
-        <c:delete val="0"/>
-        <c:axPos val="b"/>
-        <c:numFmt formatCode="General" sourceLinked="1"/>
-        <c:majorTickMark val="out"/>
-        <c:minorTickMark val="none"/>
-        <c:tickLblPos val="low"/>
-        <c:spPr>
-          <a:ln w="12700" cap="flat">
-            <a:solidFill>
-              <a:srgbClr val="888888"/>
-            </a:solidFill>
-            <a:prstDash val="solid"/>
-            <a:round/>
-          </a:ln>
-        </c:spPr>
-        <c:txPr>
-          <a:bodyPr/>
-          <a:lstStyle/>
-          <a:p>
-            <a:pPr>
-              <a:defRPr sz="1200" b="0" i="0" u="none" strike="noStrike">
-                <a:solidFill>
-                  <a:srgbClr val="0B2530"/>
-                </a:solidFill>
-                <a:latin typeface="+mn-lt"/>
-              </a:defRPr>
-            </a:pPr>
-            <a:endParaRPr lang="en-US"/>
-          </a:p>
-        </c:txPr>
-        <c:crossAx val="2094734552"/>
-        <c:crosses val="autoZero"/>
-        <c:auto val="1"/>
-        <c:lblAlgn val="ctr"/>
-        <c:noMultiLvlLbl val="1"/>
-      </c:catAx>
-      <c:valAx>
-        <c:axId val="2094734552"/>
-        <c:scaling>
-          <c:orientation val="minMax"/>
-          <c:max val="50"/>
-        </c:scaling>
-        <c:delete val="0"/>
-        <c:axPos val="l"/>
-        <c:majorGridlines>
-          <c:spPr>
-            <a:ln w="9525" cap="flat">
-              <a:solidFill>
-                <a:srgbClr val="DCE6E8"/>
-              </a:solidFill>
-              <a:prstDash val="solid"/>
-              <a:round/>
-            </a:ln>
-          </c:spPr>
-        </c:majorGridlines>
-        <c:numFmt formatCode="General" sourceLinked="0"/>
-        <c:majorTickMark val="out"/>
-        <c:minorTickMark val="none"/>
-        <c:tickLblPos val="nextTo"/>
-        <c:spPr>
-          <a:ln w="12700" cap="flat">
-            <a:solidFill>
-              <a:srgbClr val="888888"/>
-            </a:solidFill>
-            <a:prstDash val="solid"/>
-            <a:round/>
-          </a:ln>
-        </c:spPr>
-        <c:txPr>
-          <a:bodyPr/>
-          <a:lstStyle/>
-          <a:p>
-            <a:pPr>
-              <a:defRPr sz="1100" b="0" i="0" u="none" strike="noStrike">
-                <a:solidFill>
-                  <a:srgbClr val="5A6B73"/>
-                </a:solidFill>
-                <a:latin typeface="+mn-lt"/>
-              </a:defRPr>
-            </a:pPr>
-            <a:endParaRPr lang="en-US"/>
-          </a:p>
-        </c:txPr>
-        <c:crossAx val="2094734554"/>
-        <c:crosses val="autoZero"/>
-        <c:crossBetween val="between"/>
-      </c:valAx>
-      <c:spPr>
-        <a:noFill/>
-        <a:ln>
-          <a:noFill/>
-        </a:ln>
-        <a:effectLst/>
-      </c:spPr>
-    </c:plotArea>
-    <c:legend>
-      <c:legendPos val="b"/>
-      <c:overlay val="0"/>
-      <c:txPr>
-        <a:bodyPr/>
-        <a:lstStyle/>
-        <a:p>
-          <a:pPr>
-            <a:defRPr sz="1200">
-              <a:solidFill>
-                <a:srgbClr val="0B2530"/>
-              </a:solidFill>
-              <a:latin typeface="+mn-lt"/>
-              <a:cs typeface="+mn-lt"/>
-            </a:defRPr>
-          </a:pPr>
-          <a:endParaRPr lang="en-US"/>
-        </a:p>
-      </c:txPr>
-    </c:legend>
-    <c:plotVisOnly val="1"/>
-    <c:dispBlanksAs val="span"/>
-  </c:chart>
-  <c:spPr>
-    <a:noFill/>
-    <a:ln>
-      <a:noFill/>
-    </a:ln>
-    <a:effectLst/>
-  </c:spPr>
-  <c:externalData r:id="rId1">
-    <c:autoUpdate val="0"/>
-  </c:externalData>
-</c:chartSpace>
 </file>
 
 <file path=ppt/notesMasters/notesMaster1.xml><?xml version="1.0" encoding="utf-8"?>
@@ -1109,7 +724,7 @@
           <a:p>
             <a:r>
               <a:rPr lang="en-US" dirty="0"/>
-              <a:t>(1:15) A handler uses the React UI served by one FastAPI service. A LangGraph workflow runs eight stages and pauses for a person. Three stores each do what they can: the Parquet file is the authority for the 100 million claims, Synapt holds knowledge, SQLite holds runs and audit. Synapt cannot hold 100 million claims through its text-ingestion tool, so we put the right data in the right place. Models write the brief; a second, different model judges it.</a:t>
+              <a:t>(1:15) A handler uses the React UI served by one FastAPI service. A LangGraph workflow runs eight stages and pauses for a person. Three stores each do what they can: the Parquet file is the authority for the 100 million claims, Synapt holds knowledge, SQLite holds runs and audit. Synapt holds procedures as documents, from which it builds the knowledge graph, and a sample of settled claims in its ticket store; the 100 million claims stay in Parquet. Models write the brief; a second, different model judges it.</a:t>
             </a:r>
             <a:endParaRPr lang="en-US" dirty="0"/>
           </a:p>
@@ -1285,7 +900,7 @@
           <a:p>
             <a:r>
               <a:rPr lang="en-US" dirty="0"/>
-              <a:t>(1:15) Synapt holds procedures, a stratified 1,000-card sample of the 100 million claims, and handler lessons. It cannot hold all 100 million: its ingestion takes about 100 cards per call and each call takes minutes. The surprise was masking. I uploaded one probe document with a dozen identifier formats, read back what survived, and redesigned the IDs. The chart is the honest measurement: when I ask Synapt for cards similar to a claim, they match its claim type about 1.7 times as often as chance and its amount band about 1.5 times, and are no better than chance on prior claims (60 queries, no failures). Dense embeddings are weak on numeric attributes, so I weighted it down and show its picks separately instead of letting them displace better matches.</a:t>
+              <a:t>(1:15) Synapt has two stores for two kinds of content. Documents are for knowledge: the seventeen procedures, from which Synapt builds the graph of procedures and ordered steps that every brief cites. Settled claims are cases with outcomes, which is what the ticket store is for. I first put ten thousand claim rows into the documents as text cards. The review said that split was wrong, and the graph shows why: the cards were 99.6 percent of the chunks but gave 55 graph links, against 135 from seventeen procedures. So I uploaded two thousand settled claims through the Ticketing source, checked that the procedures and graph were untouched, and deleted the cards. Now the passage retriever sends the claim as one ticket, ticket-only mode, no model call, and the closest past claims are looked up in Parquet under the handler's filters. I measured the ticket labels against the majority class and they add nothing, so the app does not show them.</a:t>
             </a:r>
             <a:endParaRPr lang="en-US" dirty="0"/>
           </a:p>
@@ -1549,7 +1164,7 @@
           <a:p>
             <a:r>
               <a:rPr lang="en-US" dirty="0"/>
-              <a:t>(1:15) Three kinds of assurance. Evaluated: golden cases and DeepEval, plus a second model judging every live brief. Guarded: strict input checks, mandatory citations, and a validator that caught the model writing that a document had been provided when only its name was received; the brief was held for manual review, and a prompt fix cut that from one in four to none in four. Learning: handler feedback becomes cited evidence, and I verified the Synapt ingestion live.</a:t>
+              <a:t>(1:15) Three kinds of assurance. Evaluated: golden cases and DeepEval, plus a second model judging every live brief. Guarded: strict input checks, mandatory citations, and a validator that caught the model writing that a document had been provided when only its name was received; the brief was held for manual review, and a prompt fix cut that from one in four to none in four. Learning: handler feedback becomes cited evidence, and a handler's rating of Synapt's answer goes back to Synapt as feedback.</a:t>
             </a:r>
             <a:endParaRPr lang="en-US" dirty="0"/>
           </a:p>
@@ -1637,7 +1252,7 @@
           <a:p>
             <a:r>
               <a:rPr lang="en-US" dirty="0"/>
-              <a:t>(0:30) The limits are real and documented. The data is synthetic. Synapt holds a thousand cards, not a hundred million, so its semantic leg is a mild signal that I measured rather than assumed. The fraud model is a screening aid. Next steps are about scale and about evaluating on real handler runs. Close on the design principle: evidence informs, a person decides. Questions.</a:t>
+              <a:t>(0:30) The limits are real and documented. The data is synthetic. Synapt's ticket store holds two thousand claims, not a hundred million, so its ranking leg is a mild signal, and episode mining over those tickets has not run yet. The fraud model is a screening aid. Next steps are about scale and about evaluating on real handler runs. Close on the design principle: evidence informs, a person decides. Questions.</a:t>
             </a:r>
             <a:endParaRPr lang="en-US" dirty="0"/>
           </a:p>
@@ -2516,7 +2131,7 @@
                 <a:ea typeface="Cambria" pitchFamily="34" charset="-122"/>
                 <a:cs typeface="Cambria" pitchFamily="34" charset="-120"/>
               </a:rPr>
-              <a:t>1,000</a:t>
+              <a:t>2,000</a:t>
             </a:r>
             <a:endParaRPr lang="en-US" sz="3400" dirty="0"/>
           </a:p>
@@ -2552,7 +2167,7 @@
                   <a:srgbClr val="FFFFFF"/>
                 </a:solidFill>
               </a:rPr>
-              <a:t>claim cards in Synapt</a:t>
+              <a:t>tickets in Synapt</a:t>
             </a:r>
             <a:endParaRPr lang="en-US" sz="1600" dirty="0"/>
           </a:p>
@@ -3841,7 +3456,7 @@
                   <a:srgbClr val="5A6B73"/>
                 </a:solidFill>
               </a:rPr>
-              <a:t>Procedures, 1,000 claim cards for semantic ranking, reviewed lessons.</a:t>
+              <a:t>Procedures as documents (the knowledge graph), past claims in its ticket store, reviewed lessons.</a:t>
             </a:r>
             <a:endParaRPr lang="en-US" sz="1400" dirty="0"/>
           </a:p>
@@ -4675,7 +4290,7 @@
                   <a:srgbClr val="5A6B73"/>
                 </a:solidFill>
               </a:rPr>
-              <a:t>Cards similar to the claim; looked up under the same filters, so nothing bypasses them.</a:t>
+              <a:t>Past claims in Synapt's ticket store closest to this one; looked up under the same filters, so nothing bypasses them.</a:t>
             </a:r>
             <a:endParaRPr lang="en-US" sz="1400" dirty="0"/>
           </a:p>
@@ -5130,7 +4745,7 @@
                   <a:schemeClr val="tx1"/>
                 </a:solidFill>
               </a:rPr>
-              <a:t>Synapt: what broke, and what we measured</a:t>
+              <a:t>Synapt: the right data in the right store</a:t>
             </a:r>
             <a:endParaRPr lang="en-US" sz="3200" dirty="0"/>
           </a:p>
@@ -5179,7 +4794,7 @@
         <p:spPr>
           <a:xfrm>
             <a:off x="777240" y="1481328"/>
-            <a:ext cx="1188720" cy="365760"/>
+            <a:ext cx="2194560" cy="365760"/>
           </a:xfrm>
           <a:prstGeom prst="rect">
             <a:avLst/>
@@ -5200,7 +4815,7 @@
                   <a:srgbClr val="0E4A57"/>
                 </a:solidFill>
               </a:rPr>
-              <a:t>Holds</a:t>
+              <a:t>Documents</a:t>
             </a:r>
             <a:endParaRPr lang="en-US" sz="1800" dirty="0"/>
           </a:p>
@@ -5236,7 +4851,7 @@
                   <a:srgbClr val="0B2530"/>
                 </a:solidFill>
               </a:rPr>
-              <a:t>5 procedures, 1,000 claim cards (one per chunk), reviewed handler lessons.</a:t>
+              <a:t>17 handling procedures. Synapt builds the knowledge graph from them: 21 procedures, 93 ordered steps. Cited as evidence.</a:t>
             </a:r>
             <a:endParaRPr lang="en-US" sz="1400" dirty="0"/>
           </a:p>
@@ -5285,7 +4900,7 @@
         <p:spPr>
           <a:xfrm>
             <a:off x="777240" y="3035808"/>
-            <a:ext cx="1188720" cy="365760"/>
+            <a:ext cx="2194560" cy="365760"/>
           </a:xfrm>
           <a:prstGeom prst="rect">
             <a:avLst/>
@@ -5306,7 +4921,7 @@
                   <a:srgbClr val="D9534F"/>
                 </a:solidFill>
               </a:rPr>
-              <a:t>Broke</a:t>
+              <a:t>Was wrong</a:t>
             </a:r>
             <a:endParaRPr lang="en-US" sz="1800" dirty="0"/>
           </a:p>
@@ -5342,7 +4957,7 @@
                   <a:srgbClr val="0B2530"/>
                 </a:solidFill>
               </a:rPr>
-              <a:t>Synapt masks personal-looking text: digit IDs became phone numbers, upper-case IDs became organisations, state names became locations.</a:t>
+              <a:t>Claim rows were stored as text cards beside the procedures. Review feedback said the split was wrong, and the graph agreed.</a:t>
             </a:r>
             <a:endParaRPr lang="en-US" sz="1400" dirty="0"/>
           </a:p>
@@ -5391,7 +5006,7 @@
         <p:spPr>
           <a:xfrm>
             <a:off x="777240" y="4590288"/>
-            <a:ext cx="1188720" cy="365760"/>
+            <a:ext cx="2194560" cy="365760"/>
           </a:xfrm>
           <a:prstGeom prst="rect">
             <a:avLst/>
@@ -5412,7 +5027,7 @@
                   <a:srgbClr val="0E4A57"/>
                 </a:solidFill>
               </a:rPr>
-              <a:t>Fixed</a:t>
+              <a:t>Tickets</a:t>
             </a:r>
             <a:endParaRPr lang="en-US" sz="1800" dirty="0"/>
           </a:p>
@@ -5448,31 +5063,342 @@
                   <a:srgbClr val="0B2530"/>
                 </a:solidFill>
               </a:rPr>
-              <a:t>Letters-only lower-case aliases, an opaque region token, one card per chunk. Found with a probe document, verified on 1,000 uploads.</a:t>
+              <a:t>2,000 settled past claims in the ticket store. The claim is sent as one ticket; the closest past claims come back.</a:t>
             </a:r>
             <a:endParaRPr lang="en-US" sz="1400" dirty="0"/>
           </a:p>
         </p:txBody>
       </p:sp>
-      <p:graphicFrame>
-        <p:nvGraphicFramePr>
-          <p:cNvPr id="12" name="Chart 0" descr=""/>
-          <p:cNvGraphicFramePr/>
-          <p:nvPr/>
-        </p:nvGraphicFramePr>
-        <p:xfrm>
-          <a:off x="5989320" y="1280160"/>
-          <a:ext cx="5669280" cy="4114800"/>
-        </p:xfrm>
-        <a:graphic xmlns:a="http://schemas.openxmlformats.org/drawingml/2006/main">
-          <a:graphicData uri="http://schemas.openxmlformats.org/drawingml/2006/chart">
-            <c:chart xmlns:c="http://schemas.openxmlformats.org/drawingml/2006/chart" r:id="rId1"/>
-          </a:graphicData>
-        </a:graphic>
-      </p:graphicFrame>
-      <p:sp>
-        <p:nvSpPr>
-          <p:cNvPr id="13" name="Text 10"/>
+      <p:sp>
+        <p:nvSpPr>
+          <p:cNvPr id="12" name="Shape 10"/>
+          <p:cNvSpPr/>
+          <p:nvPr/>
+        </p:nvSpPr>
+        <p:spPr>
+          <a:xfrm>
+            <a:off x="5989320" y="1371600"/>
+            <a:ext cx="5669280" cy="1188720"/>
+          </a:xfrm>
+          <a:prstGeom prst="roundRect">
+            <a:avLst>
+              <a:gd name="adj" fmla="val 9231"/>
+            </a:avLst>
+          </a:prstGeom>
+          <a:solidFill>
+            <a:srgbClr val="E6F4F1"/>
+          </a:solidFill>
+          <a:ln w="12700">
+            <a:solidFill>
+              <a:srgbClr val="E6F4F1"/>
+            </a:solidFill>
+            <a:prstDash val="solid"/>
+          </a:ln>
+          <a:effectLst>
+            <a:outerShdw sx="100000" sy="100000" kx="0" ky="0" algn="bl" rotWithShape="0" blurRad="101600" dist="25400" dir="5400000">
+              <a:srgbClr val="000000">
+                <a:alpha val="12000"/>
+              </a:srgbClr>
+            </a:outerShdw>
+          </a:effectLst>
+        </p:spPr>
+      </p:sp>
+      <p:sp>
+        <p:nvSpPr>
+          <p:cNvPr id="13" name="Text 11"/>
+          <p:cNvSpPr txBox="1"/>
+          <p:nvPr/>
+        </p:nvSpPr>
+        <p:spPr>
+          <a:xfrm>
+            <a:off x="6217920" y="1481328"/>
+            <a:ext cx="5212080" cy="594360"/>
+          </a:xfrm>
+          <a:prstGeom prst="rect">
+            <a:avLst/>
+          </a:prstGeom>
+          <a:noFill/>
+          <a:ln/>
+        </p:spPr>
+        <p:txBody>
+          <a:bodyPr wrap="square" lIns="0" tIns="0" rIns="0" bIns="0" rtlCol="0" anchor="ctr"/>
+          <a:lstStyle/>
+          <a:p>
+            <a:pPr indent="0" marL="0">
+              <a:buNone/>
+            </a:pPr>
+            <a:r>
+              <a:rPr lang="en-US" sz="3000" b="1" dirty="0">
+                <a:solidFill>
+                  <a:srgbClr val="0E4A57"/>
+                </a:solidFill>
+                <a:latin typeface="Cambria" pitchFamily="34" charset="0"/>
+                <a:ea typeface="Cambria" pitchFamily="34" charset="-122"/>
+                <a:cs typeface="Cambria" pitchFamily="34" charset="-120"/>
+              </a:rPr>
+              <a:t>99.6%</a:t>
+            </a:r>
+            <a:endParaRPr lang="en-US" sz="3000" dirty="0"/>
+          </a:p>
+        </p:txBody>
+      </p:sp>
+      <p:sp>
+        <p:nvSpPr>
+          <p:cNvPr id="14" name="Text 12"/>
+          <p:cNvSpPr txBox="1"/>
+          <p:nvPr/>
+        </p:nvSpPr>
+        <p:spPr>
+          <a:xfrm>
+            <a:off x="6217920" y="2084832"/>
+            <a:ext cx="5212080" cy="365760"/>
+          </a:xfrm>
+          <a:prstGeom prst="rect">
+            <a:avLst/>
+          </a:prstGeom>
+          <a:noFill/>
+          <a:ln/>
+        </p:spPr>
+        <p:txBody>
+          <a:bodyPr wrap="square" lIns="0" tIns="0" rIns="0" bIns="0" rtlCol="0" anchor="ctr"/>
+          <a:lstStyle/>
+          <a:p>
+            <a:pPr indent="0" marL="0">
+              <a:buNone/>
+            </a:pPr>
+            <a:r>
+              <a:rPr lang="en-US" sz="1400" dirty="0">
+                <a:solidFill>
+                  <a:srgbClr val="5A6B73"/>
+                </a:solidFill>
+              </a:rPr>
+              <a:t>of the provider's chunks were claim cards</a:t>
+            </a:r>
+            <a:endParaRPr lang="en-US" sz="1400" dirty="0"/>
+          </a:p>
+        </p:txBody>
+      </p:sp>
+      <p:sp>
+        <p:nvSpPr>
+          <p:cNvPr id="15" name="Shape 13"/>
+          <p:cNvSpPr/>
+          <p:nvPr/>
+        </p:nvSpPr>
+        <p:spPr>
+          <a:xfrm>
+            <a:off x="5989320" y="2743200"/>
+            <a:ext cx="5669280" cy="1188720"/>
+          </a:xfrm>
+          <a:prstGeom prst="roundRect">
+            <a:avLst>
+              <a:gd name="adj" fmla="val 9231"/>
+            </a:avLst>
+          </a:prstGeom>
+          <a:solidFill>
+            <a:srgbClr val="E6F4F1"/>
+          </a:solidFill>
+          <a:ln w="12700">
+            <a:solidFill>
+              <a:srgbClr val="E6F4F1"/>
+            </a:solidFill>
+            <a:prstDash val="solid"/>
+          </a:ln>
+          <a:effectLst>
+            <a:outerShdw sx="100000" sy="100000" kx="0" ky="0" algn="bl" rotWithShape="0" blurRad="101600" dist="25400" dir="5400000">
+              <a:srgbClr val="000000">
+                <a:alpha val="12000"/>
+              </a:srgbClr>
+            </a:outerShdw>
+          </a:effectLst>
+        </p:spPr>
+      </p:sp>
+      <p:sp>
+        <p:nvSpPr>
+          <p:cNvPr id="16" name="Text 14"/>
+          <p:cNvSpPr txBox="1"/>
+          <p:nvPr/>
+        </p:nvSpPr>
+        <p:spPr>
+          <a:xfrm>
+            <a:off x="6217920" y="2852928"/>
+            <a:ext cx="5212080" cy="594360"/>
+          </a:xfrm>
+          <a:prstGeom prst="rect">
+            <a:avLst/>
+          </a:prstGeom>
+          <a:noFill/>
+          <a:ln/>
+        </p:spPr>
+        <p:txBody>
+          <a:bodyPr wrap="square" lIns="0" tIns="0" rIns="0" bIns="0" rtlCol="0" anchor="ctr"/>
+          <a:lstStyle/>
+          <a:p>
+            <a:pPr indent="0" marL="0">
+              <a:buNone/>
+            </a:pPr>
+            <a:r>
+              <a:rPr lang="en-US" sz="3000" b="1" dirty="0">
+                <a:solidFill>
+                  <a:srgbClr val="0E4A57"/>
+                </a:solidFill>
+                <a:latin typeface="Cambria" pitchFamily="34" charset="0"/>
+                <a:ea typeface="Cambria" pitchFamily="34" charset="-122"/>
+                <a:cs typeface="Cambria" pitchFamily="34" charset="-120"/>
+              </a:rPr>
+              <a:t>55 vs 135</a:t>
+            </a:r>
+            <a:endParaRPr lang="en-US" sz="3000" dirty="0"/>
+          </a:p>
+        </p:txBody>
+      </p:sp>
+      <p:sp>
+        <p:nvSpPr>
+          <p:cNvPr id="17" name="Text 15"/>
+          <p:cNvSpPr txBox="1"/>
+          <p:nvPr/>
+        </p:nvSpPr>
+        <p:spPr>
+          <a:xfrm>
+            <a:off x="6217920" y="3456432"/>
+            <a:ext cx="5212080" cy="365760"/>
+          </a:xfrm>
+          <a:prstGeom prst="rect">
+            <a:avLst/>
+          </a:prstGeom>
+          <a:noFill/>
+          <a:ln/>
+        </p:spPr>
+        <p:txBody>
+          <a:bodyPr wrap="square" lIns="0" tIns="0" rIns="0" bIns="0" rtlCol="0" anchor="ctr"/>
+          <a:lstStyle/>
+          <a:p>
+            <a:pPr indent="0" marL="0">
+              <a:buNone/>
+            </a:pPr>
+            <a:r>
+              <a:rPr lang="en-US" sz="1400" dirty="0">
+                <a:solidFill>
+                  <a:srgbClr val="5A6B73"/>
+                </a:solidFill>
+              </a:rPr>
+              <a:t>graph links: 10,020 card chunks vs 17 procedures</a:t>
+            </a:r>
+            <a:endParaRPr lang="en-US" sz="1400" dirty="0"/>
+          </a:p>
+        </p:txBody>
+      </p:sp>
+      <p:sp>
+        <p:nvSpPr>
+          <p:cNvPr id="18" name="Shape 16"/>
+          <p:cNvSpPr/>
+          <p:nvPr/>
+        </p:nvSpPr>
+        <p:spPr>
+          <a:xfrm>
+            <a:off x="5989320" y="4114800"/>
+            <a:ext cx="5669280" cy="1188720"/>
+          </a:xfrm>
+          <a:prstGeom prst="roundRect">
+            <a:avLst>
+              <a:gd name="adj" fmla="val 9231"/>
+            </a:avLst>
+          </a:prstGeom>
+          <a:solidFill>
+            <a:srgbClr val="E6F4F1"/>
+          </a:solidFill>
+          <a:ln w="12700">
+            <a:solidFill>
+              <a:srgbClr val="E6F4F1"/>
+            </a:solidFill>
+            <a:prstDash val="solid"/>
+          </a:ln>
+          <a:effectLst>
+            <a:outerShdw sx="100000" sy="100000" kx="0" ky="0" algn="bl" rotWithShape="0" blurRad="101600" dist="25400" dir="5400000">
+              <a:srgbClr val="000000">
+                <a:alpha val="12000"/>
+              </a:srgbClr>
+            </a:outerShdw>
+          </a:effectLst>
+        </p:spPr>
+      </p:sp>
+      <p:sp>
+        <p:nvSpPr>
+          <p:cNvPr id="19" name="Text 17"/>
+          <p:cNvSpPr txBox="1"/>
+          <p:nvPr/>
+        </p:nvSpPr>
+        <p:spPr>
+          <a:xfrm>
+            <a:off x="6217920" y="4224528"/>
+            <a:ext cx="5212080" cy="594360"/>
+          </a:xfrm>
+          <a:prstGeom prst="rect">
+            <a:avLst/>
+          </a:prstGeom>
+          <a:noFill/>
+          <a:ln/>
+        </p:spPr>
+        <p:txBody>
+          <a:bodyPr wrap="square" lIns="0" tIns="0" rIns="0" bIns="0" rtlCol="0" anchor="ctr"/>
+          <a:lstStyle/>
+          <a:p>
+            <a:pPr indent="0" marL="0">
+              <a:buNone/>
+            </a:pPr>
+            <a:r>
+              <a:rPr lang="en-US" sz="3000" b="1" dirty="0">
+                <a:solidFill>
+                  <a:srgbClr val="0E4A57"/>
+                </a:solidFill>
+                <a:latin typeface="Cambria" pitchFamily="34" charset="0"/>
+                <a:ea typeface="Cambria" pitchFamily="34" charset="-122"/>
+                <a:cs typeface="Cambria" pitchFamily="34" charset="-120"/>
+              </a:rPr>
+              <a:t>13 Oct</a:t>
+            </a:r>
+            <a:endParaRPr lang="en-US" sz="3000" dirty="0"/>
+          </a:p>
+        </p:txBody>
+      </p:sp>
+      <p:sp>
+        <p:nvSpPr>
+          <p:cNvPr id="20" name="Text 18"/>
+          <p:cNvSpPr txBox="1"/>
+          <p:nvPr/>
+        </p:nvSpPr>
+        <p:spPr>
+          <a:xfrm>
+            <a:off x="6217920" y="4828032"/>
+            <a:ext cx="5212080" cy="365760"/>
+          </a:xfrm>
+          <a:prstGeom prst="rect">
+            <a:avLst/>
+          </a:prstGeom>
+          <a:noFill/>
+          <a:ln/>
+        </p:spPr>
+        <p:txBody>
+          <a:bodyPr wrap="square" lIns="0" tIns="0" rIns="0" bIns="0" rtlCol="0" anchor="ctr"/>
+          <a:lstStyle/>
+          <a:p>
+            <a:pPr indent="0" marL="0">
+              <a:buNone/>
+            </a:pPr>
+            <a:r>
+              <a:rPr lang="en-US" sz="1400" dirty="0">
+                <a:solidFill>
+                  <a:srgbClr val="5A6B73"/>
+                </a:solidFill>
+              </a:rPr>
+              <a:t>cards deleted; claims moved to the ticket store</a:t>
+            </a:r>
+            <a:endParaRPr lang="en-US" sz="1400" dirty="0"/>
+          </a:p>
+        </p:txBody>
+      </p:sp>
+      <p:sp>
+        <p:nvSpPr>
+          <p:cNvPr id="21" name="Text 19"/>
           <p:cNvSpPr txBox="1"/>
           <p:nvPr/>
         </p:nvSpPr>
@@ -5500,7 +5426,7 @@
                   <a:srgbClr val="0E4A57"/>
                 </a:solidFill>
               </a:rPr>
-              <a:t>A real but mild signal: about 1.7x chance on type and state, 1.5x on amount band, none on prior claims. That is why its weight is 0.5 and its extra picks are shown separately.</a:t>
+              <a:t>Ticket labels never beat the majority class on this data, so they are not shown; the past claims are used only to rank.</a:t>
             </a:r>
             <a:endParaRPr lang="en-US" sz="1400" dirty="0"/>
           </a:p>
@@ -7453,7 +7379,7 @@
                   <a:srgbClr val="0B2530"/>
                 </a:solidFill>
               </a:rPr>
-              <a:t>169 backend and 16 UI tests</a:t>
+              <a:t>905 backend and 171 UI tests</a:t>
             </a:r>
             <a:endParaRPr lang="en-US" sz="1500" dirty="0"/>
           </a:p>
@@ -7903,7 +7829,7 @@
                   <a:srgbClr val="0B2530"/>
                 </a:solidFill>
               </a:rPr>
-              <a:t>Verified live: Synapt 21 to 22 documents</a:t>
+              <a:t>Answer ratings sent to Synapt as feedback</a:t>
             </a:r>
             <a:endParaRPr lang="en-US" sz="1500" dirty="0"/>
           </a:p>
@@ -8169,7 +8095,7 @@
                   <a:srgbClr val="FFFFFF"/>
                 </a:solidFill>
               </a:rPr>
-              <a:t>Synapt holds 1,000 of 100 million claims, so its semantic signal is mild</a:t>
+              <a:t>Synapt's ticket store holds 2,000 of 100 million claims: a mild ranking signal</a:t>
             </a:r>
             <a:endParaRPr lang="en-US" sz="1600" dirty="0"/>
           </a:p>
@@ -8308,7 +8234,7 @@
                   <a:srgbClr val="FFFFFF"/>
                 </a:solidFill>
               </a:rPr>
-              <a:t>A Synapt ticket-store provider for tabular claims at scale</a:t>
+              <a:t>Episode mining over the ticket store (not yet run)</a:t>
             </a:r>
             <a:endParaRPr lang="en-US" sz="1600" dirty="0"/>
           </a:p>
@@ -8326,7 +8252,7 @@
                   <a:srgbClr val="FFFFFF"/>
                 </a:solidFill>
               </a:rPr>
-              <a:t>A larger card corpus, with precision re-measured</a:t>
+              <a:t>A larger ticket store, with its ranking re-measured</a:t>
             </a:r>
             <a:endParaRPr lang="en-US" sz="1600" dirty="0"/>
           </a:p>
